--- a/healthiar_hessen.pptx
+++ b/healthiar_hessen.pptx
@@ -3574,7 +3574,7 @@
             </a:pPr>
             <a:r>
               <a:rPr/>
-              <a:t>Um die Umweltbedingte Krankheitslast zu berechnen, braucht healthiar ein dataframe mit expositionen und ERF zusammen. Das Zusammenführen geschieht hier:</a:t>
+              <a:t>Um die Umweltbedingte Krankheitslast zu berechnen, braucht healthiar ein dataframe mit Expositionszahlen und ERF zusammen. Das Zusammenführen geschieht hier:</a:t>
             </a:r>
           </a:p>
           <a:p>
